--- a/slides/pptx/week18.pptx
+++ b/slides/pptx/week18.pptx
@@ -506,7 +506,7 @@
           <a:p>
             <a:r>
               <a:rPr lang="en-US" dirty="0"/>
-              <a:t>Proctor deck. Before start: confirm exam version (rotate from exams/item-bank.md final pool), time, open/closed-note, integrity (no AI/phones). Keep talk minimal once the clock runs.</a:t>
+              <a:t>Proctor deck. Week 16 is the capstone studio — no new examinable content, don't imply it's in scope. Before start: confirm exam version (rotate from exams/item-bank.md final pool), time, open/closed-note, integrity (no AI/phones). Keep talk minimal once the clock runs.</a:t>
             </a:r>
             <a:endParaRPr lang="en-US" dirty="0"/>
           </a:p>
@@ -594,7 +594,7 @@
           <a:p>
             <a:r>
               <a:rPr lang="en-US" dirty="0"/>
-              <a:t>Fill the blanks aloud (e.g. 150 min). Cumulative but ~60–70% from W10–16; sections mirror the midterm (concepts / spot-vuln / applied / design).</a:t>
+              <a:t>State the section split exactly as printed. All 15 graded items map into the Weeks 10–15 block — this is closer to cumulative-in-name-only than a 60/40 split, say so if asked.</a:t>
             </a:r>
             <a:endParaRPr lang="en-US" dirty="0"/>
           </a:p>
@@ -682,7 +682,7 @@
           <a:p>
             <a:r>
               <a:rPr lang="en-US" dirty="0"/>
-              <a:t>Show briefly; matches the W17 mock. Exam day — don't teach.</a:t>
+              <a:t>BOLA/API is the one people under-revise — it's 20 of 100 points across three sections, not a single "spot the vuln" line. Show briefly; exam day — don't teach.</a:t>
             </a:r>
             <a:endParaRPr lang="en-US" dirty="0"/>
           </a:p>
@@ -770,7 +770,7 @@
           <a:p>
             <a:r>
               <a:rPr lang="en-US" dirty="0"/>
-              <a:t>Key score-saver for the final: it rewards DESIGN reasoning (where the fix belongs), not just bug-spotting. Say once, then start.</a:t>
+              <a:t>Key score-saver for the final: it rewards DESIGN reasoning (where the fix belongs), not just bug-spotting — and don't drop "API" from the mapping list, BOLA is graded. Say once, then start.</a:t>
             </a:r>
             <a:endParaRPr lang="en-US" dirty="0"/>
           </a:p>
@@ -1369,7 +1369,7 @@
                 <a:ea typeface="Calibri" pitchFamily="34" charset="-122"/>
                 <a:cs typeface="Calibri" pitchFamily="34" charset="-120"/>
               </a:rPr>
-              <a:t>Cumulative · emphasis on Weeks 10–16</a:t>
+              <a:t>Cumulative · emphasis on Weeks 10–15</a:t>
             </a:r>
             <a:endParaRPr lang="en-US" sz="1400" dirty="0"/>
           </a:p>
@@ -1506,11 +1506,11 @@
         <p:spPr>
           <a:xfrm>
             <a:off x="457200" y="1325880"/>
-            <a:ext cx="8229600" cy="896112"/>
+            <a:ext cx="8229600" cy="1408176"/>
           </a:xfrm>
           <a:prstGeom prst="roundRect">
             <a:avLst>
-              <a:gd name="adj" fmla="val 8163"/>
+              <a:gd name="adj" fmla="val 5195"/>
             </a:avLst>
           </a:prstGeom>
           <a:solidFill>
@@ -1535,7 +1535,7 @@
         <p:spPr>
           <a:xfrm>
             <a:off x="731520" y="1435608"/>
-            <a:ext cx="7680960" cy="676656"/>
+            <a:ext cx="7680960" cy="1188720"/>
           </a:xfrm>
           <a:prstGeom prst="rect">
             <a:avLst/>
@@ -1544,7 +1544,9 @@
           <a:ln/>
         </p:spPr>
         <p:txBody>
-          <a:bodyPr wrap="square" lIns="0" tIns="0" rIns="0" bIns="0" rtlCol="0" anchor="t"/>
+          <a:bodyPr wrap="square" lIns="0" tIns="0" rIns="0" bIns="0" rtlCol="0" anchor="t">
+            <a:normAutofit/>
+          </a:bodyPr>
           <a:lstStyle/>
           <a:p>
             <a:pPr marL="342900" indent="-342900">
@@ -1563,7 +1565,7 @@
                 <a:ea typeface="Calibri" pitchFamily="34" charset="-122"/>
                 <a:cs typeface="Calibri" pitchFamily="34" charset="-120"/>
               </a:rPr>
-              <a:t>Duration / open-note: (set by instructor)</a:t>
+              <a:t>Duration: 150 minutes · 100 pts</a:t>
             </a:r>
             <a:endParaRPr lang="en-US" sz="1400" dirty="0"/>
           </a:p>
@@ -1584,7 +1586,28 @@
                 <a:ea typeface="Calibri" pitchFamily="34" charset="-122"/>
                 <a:cs typeface="Calibri" pitchFamily="34" charset="-120"/>
               </a:rPr>
-              <a:t>Cumulative; weighted toward the modern-stack half</a:t>
+              <a:t>Cumulative, emphasis Weeks 10–15 (Week 16 capstone is not separately examined)</a:t>
+            </a:r>
+            <a:endParaRPr lang="en-US" sz="1400" dirty="0"/>
+          </a:p>
+          <a:p>
+            <a:pPr marL="342900" indent="-342900">
+              <a:spcAft>
+                <a:spcPts val="600"/>
+              </a:spcAft>
+              <a:buSzPct val="100000"/>
+              <a:buChar char="•"/>
+            </a:pPr>
+            <a:r>
+              <a:rPr lang="en-US" sz="1400" dirty="0">
+                <a:solidFill>
+                  <a:srgbClr val="1F2937"/>
+                </a:solidFill>
+                <a:latin typeface="Calibri" pitchFamily="34" charset="0"/>
+                <a:ea typeface="Calibri" pitchFamily="34" charset="-122"/>
+                <a:cs typeface="Calibri" pitchFamily="34" charset="-120"/>
+              </a:rPr>
+              <a:t>4 sections: A Modern-stack concepts (30) · B Spot the Vuln (20) · C Applied (30) · D Design &amp; DevSecOps (20)</a:t>
             </a:r>
             <a:endParaRPr lang="en-US" sz="1400" dirty="0"/>
           </a:p>
@@ -1784,11 +1807,11 @@
         <p:spPr>
           <a:xfrm>
             <a:off x="457200" y="1325880"/>
-            <a:ext cx="8229600" cy="2139696"/>
+            <a:ext cx="8229600" cy="2340864"/>
           </a:xfrm>
           <a:prstGeom prst="roundRect">
             <a:avLst>
-              <a:gd name="adj" fmla="val 3419"/>
+              <a:gd name="adj" fmla="val 3125"/>
             </a:avLst>
           </a:prstGeom>
           <a:solidFill>
@@ -1813,7 +1836,7 @@
         <p:spPr>
           <a:xfrm>
             <a:off x="731520" y="1435608"/>
-            <a:ext cx="7680960" cy="1920240"/>
+            <a:ext cx="7680960" cy="2121408"/>
           </a:xfrm>
           <a:prstGeom prst="rect">
             <a:avLst/>
@@ -1822,8 +1845,31 @@
           <a:ln/>
         </p:spPr>
         <p:txBody>
-          <a:bodyPr wrap="square" lIns="0" tIns="0" rIns="0" bIns="0" rtlCol="0" anchor="t"/>
+          <a:bodyPr wrap="square" lIns="0" tIns="0" rIns="0" bIns="0" rtlCol="0" anchor="t">
+            <a:normAutofit/>
+          </a:bodyPr>
           <a:lstStyle/>
+          <a:p>
+            <a:pPr marL="342900" indent="-342900">
+              <a:spcAft>
+                <a:spcPts val="600"/>
+              </a:spcAft>
+              <a:buSzPct val="100000"/>
+              <a:buChar char="•"/>
+            </a:pPr>
+            <a:r>
+              <a:rPr lang="en-US" sz="1400" dirty="0">
+                <a:solidFill>
+                  <a:srgbClr val="1F2937"/>
+                </a:solidFill>
+                <a:latin typeface="Calibri" pitchFamily="34" charset="0"/>
+                <a:ea typeface="Calibri" pitchFamily="34" charset="-122"/>
+                <a:cs typeface="Calibri" pitchFamily="34" charset="-120"/>
+              </a:rPr>
+              <a:t>API security / BOLA — object-level authorization across A/B/C (20 pts total, not a single bullet's worth)</a:t>
+            </a:r>
+            <a:endParaRPr lang="en-US" sz="1400" dirty="0"/>
+          </a:p>
           <a:p>
             <a:pPr marL="342900" indent="-342900">
               <a:spcAft>
@@ -1862,7 +1908,7 @@
                 <a:ea typeface="Calibri" pitchFamily="34" charset="-122"/>
                 <a:cs typeface="Calibri" pitchFamily="34" charset="-120"/>
               </a:rPr>
-              <a:t>Cloud / IAM least privilege</a:t>
+              <a:t>Cloud &amp; container misconfiguration (concrete examples, not IAM-specific)</a:t>
             </a:r>
             <a:endParaRPr lang="en-US" sz="1400" dirty="0"/>
           </a:p>
@@ -1925,28 +1971,7 @@
                 <a:ea typeface="Calibri" pitchFamily="34" charset="-122"/>
                 <a:cs typeface="Calibri" pitchFamily="34" charset="-120"/>
               </a:rPr>
-              <a:t>"Spot the vuln / design the fix" across the term</a:t>
-            </a:r>
-            <a:endParaRPr lang="en-US" sz="1400" dirty="0"/>
-          </a:p>
-          <a:p>
-            <a:pPr marL="342900" indent="-342900">
-              <a:spcAft>
-                <a:spcPts val="600"/>
-              </a:spcAft>
-              <a:buSzPct val="100000"/>
-              <a:buChar char="•"/>
-            </a:pPr>
-            <a:r>
-              <a:rPr lang="en-US" sz="1400" dirty="0">
-                <a:solidFill>
-                  <a:srgbClr val="1F2937"/>
-                </a:solidFill>
-                <a:latin typeface="Calibri" pitchFamily="34" charset="0"/>
-                <a:ea typeface="Calibri" pitchFamily="34" charset="-122"/>
-                <a:cs typeface="Calibri" pitchFamily="34" charset="-120"/>
-              </a:rPr>
-              <a:t>Memory-safe-language &amp; Secure-by-Design tradeoffs</a:t>
+              <a:t>Memory-safety mitigations &amp; Secure-by-Design tradeoffs</a:t>
             </a:r>
             <a:endParaRPr lang="en-US" sz="1400" dirty="0"/>
           </a:p>
@@ -2184,7 +2209,9 @@
           <a:ln/>
         </p:spPr>
         <p:txBody>
-          <a:bodyPr wrap="square" lIns="0" tIns="0" rIns="0" bIns="0" rtlCol="0" anchor="t"/>
+          <a:bodyPr wrap="square" lIns="0" tIns="0" rIns="0" bIns="0" rtlCol="0" anchor="t">
+            <a:normAutofit/>
+          </a:bodyPr>
           <a:lstStyle/>
           <a:p>
             <a:pPr marL="342900" indent="-342900">
@@ -2245,7 +2272,7 @@
                 <a:ea typeface="Calibri" pitchFamily="34" charset="-122"/>
                 <a:cs typeface="Calibri" pitchFamily="34" charset="-120"/>
               </a:rPr>
-              <a:t>Map to OWASP 2025 / LLM Top 10 / CWE</a:t>
+              <a:t>Map every finding to OWASP 2025 / API Security Top 10 / LLM Top 10 / CWE</a:t>
             </a:r>
             <a:endParaRPr lang="en-US" sz="1400" dirty="0"/>
           </a:p>

--- a/slides/pptx/week18.pptx
+++ b/slides/pptx/week18.pptx
@@ -682,7 +682,7 @@
           <a:p>
             <a:r>
               <a:rPr lang="en-US" dirty="0"/>
-              <a:t>BOLA/API is the one people under-revise — it's 20 of 100 points across three sections, not a single "spot the vuln" line. Show briefly; exam day — don't teach.</a:t>
+              <a:t>BOLA/API is the one people under-revise — it's 20 of 100 points across three sections, not a single "spot the vuln" line. The recall-vs-design 50/50 split and the explicit contrast with Week 8 (no payloads here) are the two framing points worth saying out loud. Show briefly; exam day — don't teach.</a:t>
             </a:r>
             <a:endParaRPr lang="en-US" dirty="0"/>
           </a:p>
@@ -1800,43 +1800,14 @@
       </p:sp>
       <p:sp>
         <p:nvSpPr>
-          <p:cNvPr id="5" name="Shape 2"/>
+          <p:cNvPr id="5" name="Text 2"/>
           <p:cNvSpPr/>
           <p:nvPr/>
         </p:nvSpPr>
         <p:spPr>
           <a:xfrm>
-            <a:off x="457200" y="1325880"/>
-            <a:ext cx="8229600" cy="2340864"/>
-          </a:xfrm>
-          <a:prstGeom prst="roundRect">
-            <a:avLst>
-              <a:gd name="adj" fmla="val 3125"/>
-            </a:avLst>
-          </a:prstGeom>
-          <a:solidFill>
-            <a:srgbClr val="F1F5F9"/>
-          </a:solidFill>
-          <a:ln/>
-          <a:effectLst>
-            <a:outerShdw sx="100000" sy="100000" kx="0" ky="0" algn="bl" rotWithShape="0" blurRad="76200" dist="25400" dir="5400000">
-              <a:srgbClr val="000000">
-                <a:alpha val="12000"/>
-              </a:srgbClr>
-            </a:outerShdw>
-          </a:effectLst>
-        </p:spPr>
-      </p:sp>
-      <p:sp>
-        <p:nvSpPr>
-          <p:cNvPr id="6" name="Text 3"/>
-          <p:cNvSpPr/>
-          <p:nvPr/>
-        </p:nvSpPr>
-        <p:spPr>
-          <a:xfrm>
-            <a:off x="731520" y="1435608"/>
-            <a:ext cx="7680960" cy="2121408"/>
+            <a:off x="548640" y="1325880"/>
+            <a:ext cx="8046720" cy="2468880"/>
           </a:xfrm>
           <a:prstGeom prst="rect">
             <a:avLst/>
@@ -1850,12 +1821,8 @@
           </a:bodyPr>
           <a:lstStyle/>
           <a:p>
-            <a:pPr marL="342900" indent="-342900">
-              <a:spcAft>
-                <a:spcPts val="600"/>
-              </a:spcAft>
-              <a:buSzPct val="100000"/>
-              <a:buChar char="•"/>
+            <a:pPr indent="0" marL="0">
+              <a:buNone/>
             </a:pPr>
             <a:r>
               <a:rPr lang="en-US" sz="1400" dirty="0">
@@ -1866,120 +1833,15 @@
                 <a:ea typeface="Calibri" pitchFamily="34" charset="-122"/>
                 <a:cs typeface="Calibri" pitchFamily="34" charset="-120"/>
               </a:rPr>
-              <a:t>API security / BOLA — object-level authorization across A/B/C (20 pts total, not a single bullet's worth)</a:t>
+              <a:t>See diagram: A thin foundation band (Weeks 1-6, lighter weight) plus a wide emphasis band (Weeks 10-15, most of the exam weight: BOLA/mass-assignment/rate-limits, memory safety, SLSA/SBOM/Cosign, cloud IAM, prompt injection, DevSecOps gates) — Week 16 capstone isn't examinable. Section A (30, modern-stack concepts) and B (20, spot-the-vuln) test recall; C (30, applied design, no payload required) and D (20, pipeline/incident design) test design reasoning — 50/50. Unlike Week 8's midterm, which devoted 30 points to writing an actual SQL injection payload, Week 18 requires zero points of payload-writing: the shift is from writing exploits to designing fixes. (web only)</a:t>
             </a:r>
             <a:endParaRPr lang="en-US" sz="1400" dirty="0"/>
           </a:p>
-          <a:p>
-            <a:pPr marL="342900" indent="-342900">
-              <a:spcAft>
-                <a:spcPts val="600"/>
-              </a:spcAft>
-              <a:buSzPct val="100000"/>
-              <a:buChar char="•"/>
-            </a:pPr>
-            <a:r>
-              <a:rPr lang="en-US" sz="1400" dirty="0">
-                <a:solidFill>
-                  <a:srgbClr val="1F2937"/>
-                </a:solidFill>
-                <a:latin typeface="Calibri" pitchFamily="34" charset="0"/>
-                <a:ea typeface="Calibri" pitchFamily="34" charset="-122"/>
-                <a:cs typeface="Calibri" pitchFamily="34" charset="-120"/>
-              </a:rPr>
-              <a:t>Supply-chain integrity (SLSA / SBOM / Cosign)</a:t>
-            </a:r>
-            <a:endParaRPr lang="en-US" sz="1400" dirty="0"/>
-          </a:p>
-          <a:p>
-            <a:pPr marL="342900" indent="-342900">
-              <a:spcAft>
-                <a:spcPts val="600"/>
-              </a:spcAft>
-              <a:buSzPct val="100000"/>
-              <a:buChar char="•"/>
-            </a:pPr>
-            <a:r>
-              <a:rPr lang="en-US" sz="1400" dirty="0">
-                <a:solidFill>
-                  <a:srgbClr val="1F2937"/>
-                </a:solidFill>
-                <a:latin typeface="Calibri" pitchFamily="34" charset="0"/>
-                <a:ea typeface="Calibri" pitchFamily="34" charset="-122"/>
-                <a:cs typeface="Calibri" pitchFamily="34" charset="-120"/>
-              </a:rPr>
-              <a:t>Cloud &amp; container misconfiguration (concrete examples, not IAM-specific)</a:t>
-            </a:r>
-            <a:endParaRPr lang="en-US" sz="1400" dirty="0"/>
-          </a:p>
-          <a:p>
-            <a:pPr marL="342900" indent="-342900">
-              <a:spcAft>
-                <a:spcPts val="600"/>
-              </a:spcAft>
-              <a:buSzPct val="100000"/>
-              <a:buChar char="•"/>
-            </a:pPr>
-            <a:r>
-              <a:rPr lang="en-US" sz="1400" dirty="0">
-                <a:solidFill>
-                  <a:srgbClr val="1F2937"/>
-                </a:solidFill>
-                <a:latin typeface="Calibri" pitchFamily="34" charset="0"/>
-                <a:ea typeface="Calibri" pitchFamily="34" charset="-122"/>
-                <a:cs typeface="Calibri" pitchFamily="34" charset="-120"/>
-              </a:rPr>
-              <a:t>LLM &amp; agentic threat modeling</a:t>
-            </a:r>
-            <a:endParaRPr lang="en-US" sz="1400" dirty="0"/>
-          </a:p>
-          <a:p>
-            <a:pPr marL="342900" indent="-342900">
-              <a:spcAft>
-                <a:spcPts val="600"/>
-              </a:spcAft>
-              <a:buSzPct val="100000"/>
-              <a:buChar char="•"/>
-            </a:pPr>
-            <a:r>
-              <a:rPr lang="en-US" sz="1400" dirty="0">
-                <a:solidFill>
-                  <a:srgbClr val="1F2937"/>
-                </a:solidFill>
-                <a:latin typeface="Calibri" pitchFamily="34" charset="0"/>
-                <a:ea typeface="Calibri" pitchFamily="34" charset="-122"/>
-                <a:cs typeface="Calibri" pitchFamily="34" charset="-120"/>
-              </a:rPr>
-              <a:t>DevSecOps gate design</a:t>
-            </a:r>
-            <a:endParaRPr lang="en-US" sz="1400" dirty="0"/>
-          </a:p>
-          <a:p>
-            <a:pPr marL="342900" indent="-342900">
-              <a:spcAft>
-                <a:spcPts val="600"/>
-              </a:spcAft>
-              <a:buSzPct val="100000"/>
-              <a:buChar char="•"/>
-            </a:pPr>
-            <a:r>
-              <a:rPr lang="en-US" sz="1400" dirty="0">
-                <a:solidFill>
-                  <a:srgbClr val="1F2937"/>
-                </a:solidFill>
-                <a:latin typeface="Calibri" pitchFamily="34" charset="0"/>
-                <a:ea typeface="Calibri" pitchFamily="34" charset="-122"/>
-                <a:cs typeface="Calibri" pitchFamily="34" charset="-120"/>
-              </a:rPr>
-              <a:t>Memory-safety mitigations &amp; Secure-by-Design tradeoffs</a:t>
-            </a:r>
-            <a:endParaRPr lang="en-US" sz="1400" dirty="0"/>
-          </a:p>
-        </p:txBody>
-      </p:sp>
-      <p:sp>
-        <p:nvSpPr>
-          <p:cNvPr id="7" name="Text 4"/>
+        </p:txBody>
+      </p:sp>
+      <p:sp>
+        <p:nvSpPr>
+          <p:cNvPr id="6" name="Text 3"/>
           <p:cNvSpPr/>
           <p:nvPr/>
         </p:nvSpPr>
@@ -2018,7 +1880,7 @@
       </p:sp>
       <p:pic>
         <p:nvPicPr>
-          <p:cNvPr id="8" name="Image 1" descr="/Users/pop7/Library/CloudStorage/OneDrive-MonsterConnectCo.,Ltd/Lecture/KOSEN69 - software-security/slides/pptx/assets/logo-small.png">    </p:cNvPr>
+          <p:cNvPr id="7" name="Image 1" descr="/Users/pop7/Library/CloudStorage/OneDrive-MonsterConnectCo.,Ltd/Lecture/KOSEN69 - software-security/slides/pptx/assets/logo-small.png">    </p:cNvPr>
           <p:cNvPicPr>
             <a:picLocks noChangeAspect="1"/>
           </p:cNvPicPr>
